--- a/Smart_Clinic_Vaccine_Guardian_Pitch.pptx
+++ b/Smart_Clinic_Vaccine_Guardian_Pitch.pptx
@@ -10,10 +10,7 @@
     <p:sldId id="258" r:id="rId4"/>
     <p:sldId id="259" r:id="rId5"/>
     <p:sldId id="260" r:id="rId6"/>
-    <p:sldId id="261" r:id="rId7"/>
-    <p:sldId id="262" r:id="rId8"/>
-    <p:sldId id="263" r:id="rId9"/>
-    <p:sldId id="264" r:id="rId10"/>
+    <p:sldId id="264" r:id="rId7"/>
   </p:sldIdLst>
   <p:sldSz cx="12192000" cy="6858000"/>
   <p:notesSz cx="6858000" cy="9144000"/>
@@ -131,133 +128,6 @@
 </p:presentation>
 </file>
 
-<file path=ppt/revisionInfo.xml><?xml version="1.0" encoding="utf-8"?>
-<p1510:revInfo xmlns:a="http://schemas.openxmlformats.org/drawingml/2006/main" xmlns:r="http://schemas.openxmlformats.org/officeDocument/2006/relationships" xmlns:p1510="http://schemas.microsoft.com/office/powerpoint/2015/10/main">
-  <p1510:revLst>
-    <p1510:client id="{03AF357B-5A35-42E2-A85C-AFBD407384C9}" v="2" dt="2026-09-17T21:52:41.282"/>
-  </p1510:revLst>
-</p1510:revInfo>
-</file>
-
-<file path=ppt/changesInfos/changesInfo1.xml><?xml version="1.0" encoding="utf-8"?>
-<pc:chgInfo xmlns:a="http://schemas.openxmlformats.org/drawingml/2006/main" xmlns:r="http://schemas.openxmlformats.org/officeDocument/2006/relationships" xmlns:ac="http://schemas.microsoft.com/office/drawing/2013/main/command" xmlns:pc="http://schemas.microsoft.com/office/powerpoint/2013/main/command">
-  <pc:docChgLst>
-    <pc:chgData name="Hopewell Novela" userId="ba4420d0595b93e6" providerId="LiveId" clId="{2C179679-5BF1-44D5-8556-97A5030D10F9}"/>
-    <pc:docChg chg="undo custSel addSld delSld modSld">
-      <pc:chgData name="Hopewell Novela" userId="ba4420d0595b93e6" providerId="LiveId" clId="{2C179679-5BF1-44D5-8556-97A5030D10F9}" dt="2026-09-17T22:12:51.021" v="386" actId="20577"/>
-      <pc:docMkLst>
-        <pc:docMk/>
-      </pc:docMkLst>
-      <pc:sldChg chg="modSp mod">
-        <pc:chgData name="Hopewell Novela" userId="ba4420d0595b93e6" providerId="LiveId" clId="{2C179679-5BF1-44D5-8556-97A5030D10F9}" dt="2026-09-17T22:12:51.021" v="386" actId="20577"/>
-        <pc:sldMkLst>
-          <pc:docMk/>
-          <pc:sldMk cId="0" sldId="256"/>
-        </pc:sldMkLst>
-        <pc:spChg chg="mod">
-          <ac:chgData name="Hopewell Novela" userId="ba4420d0595b93e6" providerId="LiveId" clId="{2C179679-5BF1-44D5-8556-97A5030D10F9}" dt="2026-09-17T22:12:51.021" v="386" actId="20577"/>
-          <ac:spMkLst>
-            <pc:docMk/>
-            <pc:sldMk cId="0" sldId="256"/>
-            <ac:spMk id="4" creationId="{00000000-0000-0000-0000-000000000000}"/>
-          </ac:spMkLst>
-        </pc:spChg>
-      </pc:sldChg>
-      <pc:sldChg chg="modSp mod">
-        <pc:chgData name="Hopewell Novela" userId="ba4420d0595b93e6" providerId="LiveId" clId="{2C179679-5BF1-44D5-8556-97A5030D10F9}" dt="2026-09-17T22:10:24.427" v="344" actId="20577"/>
-        <pc:sldMkLst>
-          <pc:docMk/>
-          <pc:sldMk cId="0" sldId="258"/>
-        </pc:sldMkLst>
-        <pc:spChg chg="mod">
-          <ac:chgData name="Hopewell Novela" userId="ba4420d0595b93e6" providerId="LiveId" clId="{2C179679-5BF1-44D5-8556-97A5030D10F9}" dt="2026-09-17T22:10:24.427" v="344" actId="20577"/>
-          <ac:spMkLst>
-            <pc:docMk/>
-            <pc:sldMk cId="0" sldId="258"/>
-            <ac:spMk id="4" creationId="{00000000-0000-0000-0000-000000000000}"/>
-          </ac:spMkLst>
-        </pc:spChg>
-      </pc:sldChg>
-      <pc:sldChg chg="modSp mod">
-        <pc:chgData name="Hopewell Novela" userId="ba4420d0595b93e6" providerId="LiveId" clId="{2C179679-5BF1-44D5-8556-97A5030D10F9}" dt="2026-09-17T22:10:38.704" v="358" actId="20577"/>
-        <pc:sldMkLst>
-          <pc:docMk/>
-          <pc:sldMk cId="0" sldId="259"/>
-        </pc:sldMkLst>
-        <pc:spChg chg="mod">
-          <ac:chgData name="Hopewell Novela" userId="ba4420d0595b93e6" providerId="LiveId" clId="{2C179679-5BF1-44D5-8556-97A5030D10F9}" dt="2026-09-17T22:10:38.704" v="358" actId="20577"/>
-          <ac:spMkLst>
-            <pc:docMk/>
-            <pc:sldMk cId="0" sldId="259"/>
-            <ac:spMk id="4" creationId="{00000000-0000-0000-0000-000000000000}"/>
-          </ac:spMkLst>
-        </pc:spChg>
-      </pc:sldChg>
-      <pc:sldChg chg="modSp mod">
-        <pc:chgData name="Hopewell Novela" userId="ba4420d0595b93e6" providerId="LiveId" clId="{2C179679-5BF1-44D5-8556-97A5030D10F9}" dt="2026-09-17T22:10:56.417" v="372" actId="20577"/>
-        <pc:sldMkLst>
-          <pc:docMk/>
-          <pc:sldMk cId="0" sldId="261"/>
-        </pc:sldMkLst>
-        <pc:spChg chg="mod">
-          <ac:chgData name="Hopewell Novela" userId="ba4420d0595b93e6" providerId="LiveId" clId="{2C179679-5BF1-44D5-8556-97A5030D10F9}" dt="2026-09-17T20:44:35.546" v="54" actId="20577"/>
-          <ac:spMkLst>
-            <pc:docMk/>
-            <pc:sldMk cId="0" sldId="261"/>
-            <ac:spMk id="3" creationId="{00000000-0000-0000-0000-000000000000}"/>
-          </ac:spMkLst>
-        </pc:spChg>
-        <pc:spChg chg="mod">
-          <ac:chgData name="Hopewell Novela" userId="ba4420d0595b93e6" providerId="LiveId" clId="{2C179679-5BF1-44D5-8556-97A5030D10F9}" dt="2026-09-17T22:10:56.417" v="372" actId="20577"/>
-          <ac:spMkLst>
-            <pc:docMk/>
-            <pc:sldMk cId="0" sldId="261"/>
-            <ac:spMk id="4" creationId="{00000000-0000-0000-0000-000000000000}"/>
-          </ac:spMkLst>
-        </pc:spChg>
-      </pc:sldChg>
-      <pc:sldChg chg="modSp mod">
-        <pc:chgData name="Hopewell Novela" userId="ba4420d0595b93e6" providerId="LiveId" clId="{2C179679-5BF1-44D5-8556-97A5030D10F9}" dt="2026-09-17T20:45:02.147" v="69" actId="20577"/>
-        <pc:sldMkLst>
-          <pc:docMk/>
-          <pc:sldMk cId="0" sldId="262"/>
-        </pc:sldMkLst>
-        <pc:spChg chg="mod">
-          <ac:chgData name="Hopewell Novela" userId="ba4420d0595b93e6" providerId="LiveId" clId="{2C179679-5BF1-44D5-8556-97A5030D10F9}" dt="2026-09-17T20:45:02.147" v="69" actId="20577"/>
-          <ac:spMkLst>
-            <pc:docMk/>
-            <pc:sldMk cId="0" sldId="262"/>
-            <ac:spMk id="4" creationId="{00000000-0000-0000-0000-000000000000}"/>
-          </ac:spMkLst>
-        </pc:spChg>
-      </pc:sldChg>
-      <pc:sldChg chg="modSp mod">
-        <pc:chgData name="Hopewell Novela" userId="ba4420d0595b93e6" providerId="LiveId" clId="{2C179679-5BF1-44D5-8556-97A5030D10F9}" dt="2026-09-17T22:11:14.536" v="374" actId="1076"/>
-        <pc:sldMkLst>
-          <pc:docMk/>
-          <pc:sldMk cId="0" sldId="263"/>
-        </pc:sldMkLst>
-        <pc:spChg chg="mod">
-          <ac:chgData name="Hopewell Novela" userId="ba4420d0595b93e6" providerId="LiveId" clId="{2C179679-5BF1-44D5-8556-97A5030D10F9}" dt="2026-09-17T22:11:14.536" v="374" actId="1076"/>
-          <ac:spMkLst>
-            <pc:docMk/>
-            <pc:sldMk cId="0" sldId="263"/>
-            <ac:spMk id="4" creationId="{00000000-0000-0000-0000-000000000000}"/>
-          </ac:spMkLst>
-        </pc:spChg>
-      </pc:sldChg>
-      <pc:sldChg chg="new del">
-        <pc:chgData name="Hopewell Novela" userId="ba4420d0595b93e6" providerId="LiveId" clId="{2C179679-5BF1-44D5-8556-97A5030D10F9}" dt="2026-09-17T21:49:40.921" v="87" actId="680"/>
-        <pc:sldMkLst>
-          <pc:docMk/>
-          <pc:sldMk cId="3317255031" sldId="265"/>
-        </pc:sldMkLst>
-      </pc:sldChg>
-    </pc:docChg>
-  </pc:docChgLst>
-</pc:chgInfo>
-</file>
-
 <file path=ppt/slideLayouts/slideLayout1.xml><?xml version="1.0" encoding="utf-8"?>
 <p:sldLayout xmlns:a="http://schemas.openxmlformats.org/drawingml/2006/main" xmlns:r="http://schemas.openxmlformats.org/officeDocument/2006/relationships" xmlns:p="http://schemas.openxmlformats.org/presentationml/2006/main" type="title" preserve="1">
   <p:cSld name="Title Slide">
@@ -437,7 +307,7 @@
           <a:p>
             <a:fld id="{5BCAD085-E8A6-8845-BD4E-CB4CCA059FC4}" type="datetimeFigureOut">
               <a:rPr lang="en-US" smtClean="0"/>
-              <a:t>9/17/2026</a:t>
+              <a:t>9/18/2026</a:t>
             </a:fld>
             <a:endParaRPr lang="en-US"/>
           </a:p>
@@ -605,7 +475,7 @@
           <a:p>
             <a:fld id="{5BCAD085-E8A6-8845-BD4E-CB4CCA059FC4}" type="datetimeFigureOut">
               <a:rPr lang="en-US" smtClean="0"/>
-              <a:t>9/17/2026</a:t>
+              <a:t>9/18/2026</a:t>
             </a:fld>
             <a:endParaRPr lang="en-US"/>
           </a:p>
@@ -783,7 +653,7 @@
           <a:p>
             <a:fld id="{5BCAD085-E8A6-8845-BD4E-CB4CCA059FC4}" type="datetimeFigureOut">
               <a:rPr lang="en-US" smtClean="0"/>
-              <a:t>9/17/2026</a:t>
+              <a:t>9/18/2026</a:t>
             </a:fld>
             <a:endParaRPr lang="en-US"/>
           </a:p>
@@ -951,7 +821,7 @@
           <a:p>
             <a:fld id="{5BCAD085-E8A6-8845-BD4E-CB4CCA059FC4}" type="datetimeFigureOut">
               <a:rPr lang="en-US" smtClean="0"/>
-              <a:t>9/17/2026</a:t>
+              <a:t>9/18/2026</a:t>
             </a:fld>
             <a:endParaRPr lang="en-US"/>
           </a:p>
@@ -1196,7 +1066,7 @@
           <a:p>
             <a:fld id="{5BCAD085-E8A6-8845-BD4E-CB4CCA059FC4}" type="datetimeFigureOut">
               <a:rPr lang="en-US" smtClean="0"/>
-              <a:t>9/17/2026</a:t>
+              <a:t>9/18/2026</a:t>
             </a:fld>
             <a:endParaRPr lang="en-US"/>
           </a:p>
@@ -1481,7 +1351,7 @@
           <a:p>
             <a:fld id="{5BCAD085-E8A6-8845-BD4E-CB4CCA059FC4}" type="datetimeFigureOut">
               <a:rPr lang="en-US" smtClean="0"/>
-              <a:t>9/17/2026</a:t>
+              <a:t>9/18/2026</a:t>
             </a:fld>
             <a:endParaRPr lang="en-US"/>
           </a:p>
@@ -1900,7 +1770,7 @@
           <a:p>
             <a:fld id="{5BCAD085-E8A6-8845-BD4E-CB4CCA059FC4}" type="datetimeFigureOut">
               <a:rPr lang="en-US" smtClean="0"/>
-              <a:t>9/17/2026</a:t>
+              <a:t>9/18/2026</a:t>
             </a:fld>
             <a:endParaRPr lang="en-US"/>
           </a:p>
@@ -2017,7 +1887,7 @@
           <a:p>
             <a:fld id="{5BCAD085-E8A6-8845-BD4E-CB4CCA059FC4}" type="datetimeFigureOut">
               <a:rPr lang="en-US" smtClean="0"/>
-              <a:t>9/17/2026</a:t>
+              <a:t>9/18/2026</a:t>
             </a:fld>
             <a:endParaRPr lang="en-US"/>
           </a:p>
@@ -2112,7 +1982,7 @@
           <a:p>
             <a:fld id="{5BCAD085-E8A6-8845-BD4E-CB4CCA059FC4}" type="datetimeFigureOut">
               <a:rPr lang="en-US" smtClean="0"/>
-              <a:t>9/17/2026</a:t>
+              <a:t>9/18/2026</a:t>
             </a:fld>
             <a:endParaRPr lang="en-US"/>
           </a:p>
@@ -2387,7 +2257,7 @@
           <a:p>
             <a:fld id="{5BCAD085-E8A6-8845-BD4E-CB4CCA059FC4}" type="datetimeFigureOut">
               <a:rPr lang="en-US" smtClean="0"/>
-              <a:t>9/17/2026</a:t>
+              <a:t>9/18/2026</a:t>
             </a:fld>
             <a:endParaRPr lang="en-US"/>
           </a:p>
@@ -2639,7 +2509,7 @@
           <a:p>
             <a:fld id="{5BCAD085-E8A6-8845-BD4E-CB4CCA059FC4}" type="datetimeFigureOut">
               <a:rPr lang="en-US" smtClean="0"/>
-              <a:t>9/17/2026</a:t>
+              <a:t>9/18/2026</a:t>
             </a:fld>
             <a:endParaRPr lang="en-US"/>
           </a:p>
@@ -2850,7 +2720,7 @@
           <a:p>
             <a:fld id="{5BCAD085-E8A6-8845-BD4E-CB4CCA059FC4}" type="datetimeFigureOut">
               <a:rPr lang="en-US" smtClean="0"/>
-              <a:t>9/17/2026</a:t>
+              <a:t>9/18/2026</a:t>
             </a:fld>
             <a:endParaRPr lang="en-US"/>
           </a:p>
@@ -3286,7 +3156,7 @@
         <p:spPr>
           <a:xfrm>
             <a:off x="685800" y="502920"/>
-            <a:ext cx="10789920" cy="731520"/>
+            <a:ext cx="5776966" cy="553998"/>
           </a:xfrm>
           <a:prstGeom prst="rect">
             <a:avLst/>
@@ -3307,6 +3177,7 @@
               </a:defRPr>
             </a:pPr>
             <a:r>
+              <a:rPr dirty="0"/>
               <a:t>SMART CLINIC VACCINE GUARDIAN</a:t>
             </a:r>
           </a:p>
@@ -3321,7 +3192,7 @@
         <p:spPr>
           <a:xfrm>
             <a:off x="822960" y="1417320"/>
-            <a:ext cx="10607040" cy="2477601"/>
+            <a:ext cx="10607040" cy="1928733"/>
           </a:xfrm>
           <a:prstGeom prst="rect">
             <a:avLst/>
@@ -3345,8 +3216,8 @@
               </a:defRPr>
             </a:pPr>
             <a:r>
-              <a:rPr dirty="0"/>
-              <a:t>Protecting temperature-sensitive medical stock during power outages</a:t>
+              <a:rPr lang="en-ZA" dirty="0"/>
+              <a:t>Turning Room Temperature Readings Into More Than Just Degrees and Celsius, Here’s HOW? </a:t>
             </a:r>
           </a:p>
           <a:p>
@@ -3362,17 +3233,36 @@
             </a:pPr>
             <a:r>
               <a:rPr dirty="0"/>
-              <a:t>Mpumalanga Rural Healthcare • </a:t>
+              <a:t>•</a:t>
             </a:r>
             <a:r>
               <a:rPr lang="en-ZA" dirty="0"/>
-              <a:t>ESP32</a:t>
+              <a:t> ESP-32</a:t>
             </a:r>
             <a:r>
               <a:rPr dirty="0"/>
-              <a:t> + DHT22 + Edge Intelligence</a:t>
-            </a:r>
-            <a:endParaRPr lang="en-ZA" dirty="0"/>
+              <a:t> </a:t>
+            </a:r>
+            <a:r>
+              <a:rPr lang="en-ZA" dirty="0"/>
+              <a:t>,</a:t>
+            </a:r>
+            <a:r>
+              <a:rPr dirty="0"/>
+              <a:t> DHT22 </a:t>
+            </a:r>
+            <a:r>
+              <a:rPr lang="en-ZA" dirty="0"/>
+              <a:t>,</a:t>
+            </a:r>
+            <a:r>
+              <a:rPr dirty="0"/>
+              <a:t> Edge Intelligence</a:t>
+            </a:r>
+            <a:r>
+              <a:rPr lang="en-ZA" dirty="0"/>
+              <a:t> + VAXGUARD 365 App</a:t>
+            </a:r>
           </a:p>
           <a:p>
             <a:pPr algn="ctr">
@@ -3385,22 +3275,17 @@
                 </a:solidFill>
               </a:defRPr>
             </a:pPr>
-            <a:endParaRPr lang="en-ZA" dirty="0"/>
-          </a:p>
-          <a:p>
-            <a:pPr algn="ctr">
-              <a:spcAft>
-                <a:spcPts val="1400"/>
-              </a:spcAft>
-              <a:defRPr sz="2400">
-                <a:solidFill>
-                  <a:srgbClr val="DCE4EB"/>
-                </a:solidFill>
-              </a:defRPr>
-            </a:pPr>
             <a:r>
               <a:rPr lang="en-ZA" i="1" dirty="0"/>
-              <a:t>Did you know that the vaccine storage in clinics has to remain between 2’C and 8’C or the vaccines will be rendered useless? </a:t>
+              <a:t>We use </a:t>
+            </a:r>
+            <a:r>
+              <a:rPr lang="en-ZA" i="1" u="sng" dirty="0"/>
+              <a:t>4IR</a:t>
+            </a:r>
+            <a:r>
+              <a:rPr lang="en-ZA" i="1" dirty="0"/>
+              <a:t> tech to turn data into reliable, state of the art cold-rooms. </a:t>
             </a:r>
           </a:p>
         </p:txBody>
@@ -3561,7 +3446,7 @@
         <p:spPr>
           <a:xfrm>
             <a:off x="822960" y="1417320"/>
-            <a:ext cx="10607040" cy="4663440"/>
+            <a:ext cx="10607040" cy="1862048"/>
           </a:xfrm>
           <a:prstGeom prst="rect">
             <a:avLst/>
@@ -3585,6 +3470,7 @@
               </a:defRPr>
             </a:pPr>
             <a:r>
+              <a:rPr dirty="0"/>
               <a:t>Rural clinics experience power outages and unstable electricity.</a:t>
             </a:r>
           </a:p>
@@ -3600,7 +3486,16 @@
               </a:defRPr>
             </a:pPr>
             <a:r>
-              <a:t>Cold-storage temperature can rise unnoticed for hours.</a:t>
+              <a:rPr dirty="0"/>
+              <a:t>Cold-storage temperature can rise unnoticed for hours</a:t>
+            </a:r>
+            <a:r>
+              <a:rPr lang="en-ZA" dirty="0"/>
+              <a:t>, that’s where we come in</a:t>
+            </a:r>
+            <a:r>
+              <a:rPr dirty="0"/>
+              <a:t>.</a:t>
             </a:r>
           </a:p>
           <a:p>
@@ -3615,8 +3510,14 @@
               </a:defRPr>
             </a:pPr>
             <a:r>
+              <a:rPr dirty="0"/>
               <a:t>Vaccines, insulin and blood supplies may become unsafe and have to be discarded.</a:t>
             </a:r>
+            <a:r>
+              <a:rPr lang="en-ZA" dirty="0"/>
+              <a:t> </a:t>
+            </a:r>
+            <a:endParaRPr dirty="0"/>
           </a:p>
           <a:p>
             <a:pPr>
@@ -3630,8 +3531,18 @@
               </a:defRPr>
             </a:pPr>
             <a:r>
+              <a:rPr lang="en-ZA" dirty="0"/>
+              <a:t>Clinic </a:t>
+            </a:r>
+            <a:r>
+              <a:rPr dirty="0"/>
               <a:t>Staff need an early warning — not a late discovery.</a:t>
             </a:r>
+            <a:r>
+              <a:rPr lang="en-ZA" dirty="0"/>
+              <a:t> </a:t>
+            </a:r>
+            <a:endParaRPr dirty="0"/>
           </a:p>
         </p:txBody>
       </p:sp>
@@ -3791,7 +3702,7 @@
         <p:spPr>
           <a:xfrm>
             <a:off x="822960" y="1417320"/>
-            <a:ext cx="10607040" cy="2836674"/>
+            <a:ext cx="10607040" cy="1862048"/>
           </a:xfrm>
           <a:prstGeom prst="rect">
             <a:avLst/>
@@ -3831,8 +3742,12 @@
               </a:defRPr>
             </a:pPr>
             <a:r>
+              <a:rPr lang="en-ZA" dirty="0"/>
+              <a:t>The system</a:t>
+            </a:r>
+            <a:r>
               <a:rPr dirty="0"/>
-              <a:t>DHT22 measures temperature and humidity in real time.</a:t>
+              <a:t> predicts thermal drift and estimated time-to-critical temperature.</a:t>
             </a:r>
           </a:p>
           <a:p>
@@ -3847,12 +3762,8 @@
               </a:defRPr>
             </a:pPr>
             <a:r>
-              <a:rPr lang="en-ZA" dirty="0"/>
-              <a:t>ESP32</a:t>
-            </a:r>
-            <a:r>
               <a:rPr dirty="0"/>
-              <a:t> predicts thermal drift and estimated time-to-critical temperature.</a:t>
+              <a:t>Alerts staff before the safe threshold is breached.</a:t>
             </a:r>
           </a:p>
           <a:p>
@@ -3868,39 +3779,7 @@
             </a:pPr>
             <a:r>
               <a:rPr dirty="0"/>
-              <a:t>Alerts staff before the safe threshold is breached.</a:t>
-            </a:r>
-          </a:p>
-          <a:p>
-            <a:pPr>
-              <a:spcAft>
-                <a:spcPts val="1400"/>
-              </a:spcAft>
-              <a:defRPr sz="2000">
-                <a:solidFill>
-                  <a:srgbClr val="DCE4EB"/>
-                </a:solidFill>
-              </a:defRPr>
-            </a:pPr>
-            <a:r>
-              <a:rPr dirty="0"/>
               <a:t>Relay automatically activates secondary cooling.</a:t>
-            </a:r>
-          </a:p>
-          <a:p>
-            <a:pPr>
-              <a:spcAft>
-                <a:spcPts val="1400"/>
-              </a:spcAft>
-              <a:defRPr sz="2000">
-                <a:solidFill>
-                  <a:srgbClr val="DCE4EB"/>
-                </a:solidFill>
-              </a:defRPr>
-            </a:pPr>
-            <a:r>
-              <a:rPr dirty="0"/>
-              <a:t>3D digital twin displays the cold unit's live safety state.</a:t>
             </a:r>
           </a:p>
         </p:txBody>
@@ -3940,6 +3819,36 @@
           </a:p>
         </p:txBody>
       </p:sp>
+      <p:pic>
+        <p:nvPicPr>
+          <p:cNvPr id="9" name="Picture 8">
+            <a:extLst>
+              <a:ext uri="{FF2B5EF4-FFF2-40B4-BE49-F238E27FC236}">
+                <a16:creationId xmlns:a16="http://schemas.microsoft.com/office/drawing/2014/main" id="{63583BBD-4AFA-0578-CE01-53956FBB0302}"/>
+              </a:ext>
+            </a:extLst>
+          </p:cNvPr>
+          <p:cNvPicPr>
+            <a:picLocks noChangeAspect="1"/>
+          </p:cNvPicPr>
+          <p:nvPr/>
+        </p:nvPicPr>
+        <p:blipFill>
+          <a:blip r:embed="rId2"/>
+          <a:stretch>
+            <a:fillRect/>
+          </a:stretch>
+        </p:blipFill>
+        <p:spPr>
+          <a:xfrm>
+            <a:off x="6606540" y="3578633"/>
+            <a:ext cx="4869180" cy="2914650"/>
+          </a:xfrm>
+          <a:prstGeom prst="rect">
+            <a:avLst/>
+          </a:prstGeom>
+        </p:spPr>
+      </p:pic>
     </p:spTree>
   </p:cSld>
   <p:clrMapOvr>
@@ -4026,7 +3935,7 @@
         <p:spPr>
           <a:xfrm>
             <a:off x="685800" y="502920"/>
-            <a:ext cx="10789920" cy="731520"/>
+            <a:ext cx="6075253" cy="553998"/>
           </a:xfrm>
           <a:prstGeom prst="rect">
             <a:avLst/>
@@ -4047,8 +3956,14 @@
               </a:defRPr>
             </a:pPr>
             <a:r>
+              <a:rPr dirty="0"/>
               <a:t>HOW IT WORKS</a:t>
             </a:r>
+            <a:r>
+              <a:rPr lang="en-ZA" dirty="0"/>
+              <a:t> AND WHY IT WORKS</a:t>
+            </a:r>
+            <a:endParaRPr dirty="0"/>
           </a:p>
         </p:txBody>
       </p:sp>
@@ -4061,7 +3976,7 @@
         <p:spPr>
           <a:xfrm>
             <a:off x="822960" y="1417320"/>
-            <a:ext cx="10607040" cy="2349361"/>
+            <a:ext cx="5496817" cy="2477601"/>
           </a:xfrm>
           <a:prstGeom prst="rect">
             <a:avLst/>
@@ -4085,8 +4000,12 @@
               </a:defRPr>
             </a:pPr>
             <a:r>
+              <a:rPr u="sng" dirty="0"/>
+              <a:t>SENSE</a:t>
+            </a:r>
+            <a:r>
               <a:rPr dirty="0"/>
-              <a:t>SENSE → DHT22 continuously measures conditions.</a:t>
+              <a:t> → DHT22 continuously measures conditions.</a:t>
             </a:r>
           </a:p>
           <a:p>
@@ -4101,8 +4020,12 @@
               </a:defRPr>
             </a:pPr>
             <a:r>
+              <a:rPr u="sng" dirty="0"/>
+              <a:t>ANALYSE</a:t>
+            </a:r>
+            <a:r>
               <a:rPr dirty="0"/>
-              <a:t>ANALYSE → </a:t>
+              <a:t> → </a:t>
             </a:r>
             <a:r>
               <a:rPr lang="en-ZA" dirty="0"/>
@@ -4110,7 +4033,15 @@
             </a:r>
             <a:r>
               <a:rPr dirty="0"/>
-              <a:t> processes readings at the edge.</a:t>
+              <a:t> processes readings at</a:t>
+            </a:r>
+            <a:r>
+              <a:rPr lang="en-ZA" dirty="0"/>
+              <a:t> the edge</a:t>
+            </a:r>
+            <a:r>
+              <a:rPr dirty="0"/>
+              <a:t>.</a:t>
             </a:r>
           </a:p>
           <a:p>
@@ -4125,8 +4056,12 @@
               </a:defRPr>
             </a:pPr>
             <a:r>
+              <a:rPr u="sng" dirty="0"/>
+              <a:t>PREDICT </a:t>
+            </a:r>
+            <a:r>
               <a:rPr dirty="0"/>
-              <a:t>PREDICT → Thermal drift estimates time remaining before critical temperature.</a:t>
+              <a:t>→ Thermal drift estimates time remaining before critical temperature.</a:t>
             </a:r>
           </a:p>
           <a:p>
@@ -4141,24 +4076,20 @@
               </a:defRPr>
             </a:pPr>
             <a:r>
+              <a:rPr u="sng" dirty="0"/>
+              <a:t>ACT</a:t>
+            </a:r>
+            <a:r>
               <a:rPr dirty="0"/>
-              <a:t>ACT → Relay triggers backup cooling.</a:t>
-            </a:r>
-          </a:p>
-          <a:p>
-            <a:pPr>
-              <a:spcAft>
-                <a:spcPts val="1400"/>
-              </a:spcAft>
-              <a:defRPr sz="2000">
-                <a:solidFill>
-                  <a:srgbClr val="DCE4EB"/>
-                </a:solidFill>
-              </a:defRPr>
-            </a:pPr>
+              <a:t> → Relay triggers backup cooling</a:t>
+            </a:r>
+            <a:r>
+              <a:rPr lang="en-ZA" dirty="0"/>
+              <a:t> in real time</a:t>
+            </a:r>
             <a:r>
               <a:rPr dirty="0"/>
-              <a:t>VISUALISE → Digital twin shows GREEN / YELLOW / RED safety status.</a:t>
+              <a:t>.</a:t>
             </a:r>
           </a:p>
         </p:txBody>
@@ -4194,6 +4125,135 @@
             </a:pPr>
             <a:r>
               <a:t>SMART CLINIC VACCINE GUARDIAN  |  04</a:t>
+            </a:r>
+          </a:p>
+        </p:txBody>
+      </p:sp>
+      <p:sp>
+        <p:nvSpPr>
+          <p:cNvPr id="6" name="TextBox 5">
+            <a:extLst>
+              <a:ext uri="{FF2B5EF4-FFF2-40B4-BE49-F238E27FC236}">
+                <a16:creationId xmlns:a16="http://schemas.microsoft.com/office/drawing/2014/main" id="{972AE0EB-6C02-E935-E9B9-F4094AC85B06}"/>
+              </a:ext>
+            </a:extLst>
+          </p:cNvPr>
+          <p:cNvSpPr txBox="1"/>
+          <p:nvPr/>
+        </p:nvSpPr>
+        <p:spPr>
+          <a:xfrm>
+            <a:off x="6854190" y="1417320"/>
+            <a:ext cx="5067734" cy="3888244"/>
+          </a:xfrm>
+          <a:prstGeom prst="rect">
+            <a:avLst/>
+          </a:prstGeom>
+          <a:noFill/>
+        </p:spPr>
+        <p:txBody>
+          <a:bodyPr wrap="square" rtlCol="0">
+            <a:spAutoFit/>
+          </a:bodyPr>
+          <a:lstStyle/>
+          <a:p>
+            <a:pPr>
+              <a:spcAft>
+                <a:spcPts val="1400"/>
+              </a:spcAft>
+              <a:defRPr sz="2000">
+                <a:solidFill>
+                  <a:srgbClr val="DCE4EB"/>
+                </a:solidFill>
+              </a:defRPr>
+            </a:pPr>
+            <a:r>
+              <a:rPr lang="en-GB" u="sng" dirty="0"/>
+              <a:t>EARLY WARNING </a:t>
+            </a:r>
+            <a:r>
+              <a:rPr lang="en-GB" dirty="0"/>
+              <a:t>— Know when cold storage is drifting toward danger.</a:t>
+            </a:r>
+          </a:p>
+          <a:p>
+            <a:pPr>
+              <a:spcAft>
+                <a:spcPts val="1400"/>
+              </a:spcAft>
+              <a:defRPr sz="2000">
+                <a:solidFill>
+                  <a:srgbClr val="DCE4EB"/>
+                </a:solidFill>
+              </a:defRPr>
+            </a:pPr>
+            <a:r>
+              <a:rPr lang="en-GB" u="sng" dirty="0"/>
+              <a:t>AUTOMATIC RESPONSE</a:t>
+            </a:r>
+            <a:r>
+              <a:rPr lang="en-GB" dirty="0"/>
+              <a:t> — Reduce dependence on manual intervention.</a:t>
+            </a:r>
+          </a:p>
+          <a:p>
+            <a:pPr>
+              <a:spcAft>
+                <a:spcPts val="1400"/>
+              </a:spcAft>
+              <a:defRPr sz="2000">
+                <a:solidFill>
+                  <a:srgbClr val="DCE4EB"/>
+                </a:solidFill>
+              </a:defRPr>
+            </a:pPr>
+            <a:r>
+              <a:rPr lang="en-GB" u="sng" dirty="0"/>
+              <a:t>LESS WASTE</a:t>
+            </a:r>
+            <a:r>
+              <a:rPr lang="en-GB" dirty="0"/>
+              <a:t> — Help prevent avoidable loss of medical stock.</a:t>
+            </a:r>
+          </a:p>
+          <a:p>
+            <a:pPr>
+              <a:spcAft>
+                <a:spcPts val="1400"/>
+              </a:spcAft>
+              <a:defRPr sz="2000">
+                <a:solidFill>
+                  <a:srgbClr val="DCE4EB"/>
+                </a:solidFill>
+              </a:defRPr>
+            </a:pPr>
+            <a:r>
+              <a:rPr lang="en-GB" u="sng" dirty="0"/>
+              <a:t>RURAL-FIRST</a:t>
+            </a:r>
+            <a:r>
+              <a:rPr lang="en-GB" dirty="0"/>
+              <a:t> — Designed around unreliable electricity and limited resources.</a:t>
+            </a:r>
+          </a:p>
+          <a:p>
+            <a:pPr>
+              <a:spcAft>
+                <a:spcPts val="1400"/>
+              </a:spcAft>
+              <a:defRPr sz="2000">
+                <a:solidFill>
+                  <a:srgbClr val="DCE4EB"/>
+                </a:solidFill>
+              </a:defRPr>
+            </a:pPr>
+            <a:r>
+              <a:rPr lang="en-GB" u="sng" dirty="0"/>
+              <a:t>SCALABLE</a:t>
+            </a:r>
+            <a:r>
+              <a:rPr lang="en-GB" dirty="0"/>
+              <a:t> — The architecture can serve clinics across South Africa.</a:t>
             </a:r>
           </a:p>
         </p:txBody>
@@ -4319,7 +4379,7 @@
         <p:spPr>
           <a:xfrm>
             <a:off x="822960" y="1417320"/>
-            <a:ext cx="10607040" cy="4663440"/>
+            <a:ext cx="10607040" cy="2395528"/>
           </a:xfrm>
           <a:prstGeom prst="rect">
             <a:avLst/>
@@ -4343,7 +4403,12 @@
               </a:defRPr>
             </a:pPr>
             <a:r>
-              <a:t>PRIMARY: Rural primary healthcare clinics in Mpumalanga.</a:t>
+              <a:rPr u="sng" dirty="0"/>
+              <a:t>PRIMARY</a:t>
+            </a:r>
+            <a:r>
+              <a:rPr dirty="0"/>
+              <a:t>: Rural primary healthcare clinics in Mpumalanga.</a:t>
             </a:r>
           </a:p>
           <a:p>
@@ -4358,7 +4423,16 @@
               </a:defRPr>
             </a:pPr>
             <a:r>
-              <a:t>Focus districts: Ehlanzeni and Gert Sibande.</a:t>
+              <a:rPr u="sng" dirty="0"/>
+              <a:t>F</a:t>
+            </a:r>
+            <a:r>
+              <a:rPr lang="en-ZA" u="sng" dirty="0"/>
+              <a:t>OCUS DISTRICTS</a:t>
+            </a:r>
+            <a:r>
+              <a:rPr dirty="0"/>
+              <a:t>: Ehlanzeni and Gert Sibande.</a:t>
             </a:r>
           </a:p>
           <a:p>
@@ -4373,7 +4447,20 @@
               </a:defRPr>
             </a:pPr>
             <a:r>
-              <a:t>SECONDARY: District hospitals, community health centres and mobile healthcare units.</a:t>
+              <a:rPr u="sng" dirty="0"/>
+              <a:t>SECONDARY:</a:t>
+            </a:r>
+            <a:r>
+              <a:rPr dirty="0"/>
+              <a:t> District hospitals, community health </a:t>
+            </a:r>
+            <a:r>
+              <a:rPr lang="en-ZA" dirty="0"/>
+              <a:t>centres</a:t>
+            </a:r>
+            <a:r>
+              <a:rPr dirty="0"/>
+              <a:t> and mobile healthcare units.</a:t>
             </a:r>
           </a:p>
           <a:p>
@@ -4388,7 +4475,12 @@
               </a:defRPr>
             </a:pPr>
             <a:r>
-              <a:t>EXPANSION: Rural healthcare facilities across South Africa.</a:t>
+              <a:rPr u="sng" dirty="0"/>
+              <a:t>EXPANSION</a:t>
+            </a:r>
+            <a:r>
+              <a:rPr dirty="0"/>
+              <a:t>: Rural healthcare facilities across South Africa.</a:t>
             </a:r>
           </a:p>
           <a:p>
@@ -4403,7 +4495,12 @@
               </a:defRPr>
             </a:pPr>
             <a:r>
-              <a:t>Need: affordable monitoring that remains useful when grid electricity is unreliable.</a:t>
+              <a:rPr sz="2300" u="sng" dirty="0"/>
+              <a:t>Need</a:t>
+            </a:r>
+            <a:r>
+              <a:rPr sz="2300" dirty="0"/>
+              <a:t>: affordable monitoring that remains useful when grid electricity is unreliable.</a:t>
             </a:r>
           </a:p>
         </p:txBody>
@@ -4452,873 +4549,6 @@
 </file>
 
 <file path=ppt/slides/slide6.xml><?xml version="1.0" encoding="utf-8"?>
-<p:sld xmlns:a="http://schemas.openxmlformats.org/drawingml/2006/main" xmlns:r="http://schemas.openxmlformats.org/officeDocument/2006/relationships" xmlns:p="http://schemas.openxmlformats.org/presentationml/2006/main">
-  <p:cSld>
-    <p:bg>
-      <p:bgPr>
-        <a:solidFill>
-          <a:srgbClr val="0C121C"/>
-        </a:solidFill>
-        <a:effectLst/>
-      </p:bgPr>
-    </p:bg>
-    <p:spTree>
-      <p:nvGrpSpPr>
-        <p:cNvPr id="1" name=""/>
-        <p:cNvGrpSpPr/>
-        <p:nvPr/>
-      </p:nvGrpSpPr>
-      <p:grpSpPr>
-        <a:xfrm>
-          <a:off x="0" y="0"/>
-          <a:ext cx="0" cy="0"/>
-          <a:chOff x="0" y="0"/>
-          <a:chExt cx="0" cy="0"/>
-        </a:xfrm>
-      </p:grpSpPr>
-      <p:sp>
-        <p:nvSpPr>
-          <p:cNvPr id="2" name="Rectangle 1"/>
-          <p:cNvSpPr/>
-          <p:nvPr/>
-        </p:nvSpPr>
-        <p:spPr>
-          <a:xfrm>
-            <a:off x="0" y="0"/>
-            <a:ext cx="164592" cy="6858000"/>
-          </a:xfrm>
-          <a:prstGeom prst="rect">
-            <a:avLst/>
-          </a:prstGeom>
-          <a:solidFill>
-            <a:srgbClr val="4BBE78"/>
-          </a:solidFill>
-          <a:ln>
-            <a:noFill/>
-          </a:ln>
-        </p:spPr>
-        <p:style>
-          <a:lnRef idx="1">
-            <a:schemeClr val="accent1"/>
-          </a:lnRef>
-          <a:fillRef idx="3">
-            <a:schemeClr val="accent1"/>
-          </a:fillRef>
-          <a:effectRef idx="2">
-            <a:schemeClr val="accent1"/>
-          </a:effectRef>
-          <a:fontRef idx="minor">
-            <a:schemeClr val="lt1"/>
-          </a:fontRef>
-        </p:style>
-        <p:txBody>
-          <a:bodyPr rtlCol="0" anchor="ctr"/>
-          <a:lstStyle/>
-          <a:p>
-            <a:pPr algn="ctr"/>
-            <a:endParaRPr/>
-          </a:p>
-        </p:txBody>
-      </p:sp>
-      <p:sp>
-        <p:nvSpPr>
-          <p:cNvPr id="3" name="TextBox 2"/>
-          <p:cNvSpPr txBox="1"/>
-          <p:nvPr/>
-        </p:nvSpPr>
-        <p:spPr>
-          <a:xfrm>
-            <a:off x="685800" y="502920"/>
-            <a:ext cx="3525324" cy="553998"/>
-          </a:xfrm>
-          <a:prstGeom prst="rect">
-            <a:avLst/>
-          </a:prstGeom>
-          <a:noFill/>
-        </p:spPr>
-        <p:txBody>
-          <a:bodyPr wrap="none">
-            <a:spAutoFit/>
-          </a:bodyPr>
-          <a:lstStyle/>
-          <a:p>
-            <a:pPr>
-              <a:defRPr sz="3000" b="1">
-                <a:solidFill>
-                  <a:srgbClr val="F5F8FA"/>
-                </a:solidFill>
-              </a:defRPr>
-            </a:pPr>
-            <a:r>
-              <a:rPr dirty="0"/>
-              <a:t>THE ASK — R</a:t>
-            </a:r>
-            <a:r>
-              <a:rPr lang="en-ZA" dirty="0"/>
-              <a:t>100</a:t>
-            </a:r>
-            <a:r>
-              <a:rPr dirty="0"/>
-              <a:t>,000</a:t>
-            </a:r>
-          </a:p>
-        </p:txBody>
-      </p:sp>
-      <p:sp>
-        <p:nvSpPr>
-          <p:cNvPr id="4" name="TextBox 3"/>
-          <p:cNvSpPr txBox="1"/>
-          <p:nvPr/>
-        </p:nvSpPr>
-        <p:spPr>
-          <a:xfrm>
-            <a:off x="822960" y="1417320"/>
-            <a:ext cx="10607040" cy="3323987"/>
-          </a:xfrm>
-          <a:prstGeom prst="rect">
-            <a:avLst/>
-          </a:prstGeom>
-          <a:noFill/>
-        </p:spPr>
-        <p:txBody>
-          <a:bodyPr wrap="square">
-            <a:spAutoFit/>
-          </a:bodyPr>
-          <a:lstStyle/>
-          <a:p>
-            <a:pPr>
-              <a:spcAft>
-                <a:spcPts val="1400"/>
-              </a:spcAft>
-              <a:defRPr sz="2000">
-                <a:solidFill>
-                  <a:srgbClr val="DCE4EB"/>
-                </a:solidFill>
-              </a:defRPr>
-            </a:pPr>
-            <a:r>
-              <a:rPr lang="en-ZA" dirty="0"/>
-              <a:t>20</a:t>
-            </a:r>
-            <a:r>
-              <a:rPr dirty="0"/>
-              <a:t> prototype monitoring units</a:t>
-            </a:r>
-          </a:p>
-          <a:p>
-            <a:pPr>
-              <a:spcAft>
-                <a:spcPts val="1400"/>
-              </a:spcAft>
-              <a:defRPr sz="2000">
-                <a:solidFill>
-                  <a:srgbClr val="DCE4EB"/>
-                </a:solidFill>
-              </a:defRPr>
-            </a:pPr>
-            <a:r>
-              <a:rPr lang="en-ZA" dirty="0"/>
-              <a:t>ESP32</a:t>
-            </a:r>
-            <a:r>
-              <a:rPr dirty="0"/>
-              <a:t>, DHT22, relay and supporting electronics</a:t>
-            </a:r>
-          </a:p>
-          <a:p>
-            <a:pPr>
-              <a:spcAft>
-                <a:spcPts val="1400"/>
-              </a:spcAft>
-              <a:defRPr sz="2000">
-                <a:solidFill>
-                  <a:srgbClr val="DCE4EB"/>
-                </a:solidFill>
-              </a:defRPr>
-            </a:pPr>
-            <a:r>
-              <a:rPr dirty="0"/>
-              <a:t>Backup-cooling prototype components</a:t>
-            </a:r>
-          </a:p>
-          <a:p>
-            <a:pPr>
-              <a:spcAft>
-                <a:spcPts val="1400"/>
-              </a:spcAft>
-              <a:defRPr sz="2000">
-                <a:solidFill>
-                  <a:srgbClr val="DCE4EB"/>
-                </a:solidFill>
-              </a:defRPr>
-            </a:pPr>
-            <a:r>
-              <a:rPr dirty="0"/>
-              <a:t>Telemetry and dashboard infrastructure</a:t>
-            </a:r>
-          </a:p>
-          <a:p>
-            <a:pPr>
-              <a:spcAft>
-                <a:spcPts val="1400"/>
-              </a:spcAft>
-              <a:defRPr sz="2000">
-                <a:solidFill>
-                  <a:srgbClr val="DCE4EB"/>
-                </a:solidFill>
-              </a:defRPr>
-            </a:pPr>
-            <a:r>
-              <a:rPr dirty="0"/>
-              <a:t>3D digital-twin development</a:t>
-            </a:r>
-          </a:p>
-          <a:p>
-            <a:pPr>
-              <a:spcAft>
-                <a:spcPts val="1400"/>
-              </a:spcAft>
-              <a:defRPr sz="2000">
-                <a:solidFill>
-                  <a:srgbClr val="DCE4EB"/>
-                </a:solidFill>
-              </a:defRPr>
-            </a:pPr>
-            <a:r>
-              <a:rPr dirty="0"/>
-              <a:t>Pilot testing and data collection at rural clinics</a:t>
-            </a:r>
-          </a:p>
-          <a:p>
-            <a:pPr>
-              <a:spcAft>
-                <a:spcPts val="1400"/>
-              </a:spcAft>
-              <a:defRPr sz="2000">
-                <a:solidFill>
-                  <a:srgbClr val="DCE4EB"/>
-                </a:solidFill>
-              </a:defRPr>
-            </a:pPr>
-            <a:r>
-              <a:rPr dirty="0"/>
-              <a:t>GOAL: Deploy → validate → improve → prepare for scale.</a:t>
-            </a:r>
-          </a:p>
-        </p:txBody>
-      </p:sp>
-      <p:sp>
-        <p:nvSpPr>
-          <p:cNvPr id="5" name="TextBox 4"/>
-          <p:cNvSpPr txBox="1"/>
-          <p:nvPr/>
-        </p:nvSpPr>
-        <p:spPr>
-          <a:xfrm>
-            <a:off x="685800" y="6446520"/>
-            <a:ext cx="10789920" cy="228600"/>
-          </a:xfrm>
-          <a:prstGeom prst="rect">
-            <a:avLst/>
-          </a:prstGeom>
-          <a:noFill/>
-        </p:spPr>
-        <p:txBody>
-          <a:bodyPr wrap="none">
-            <a:spAutoFit/>
-          </a:bodyPr>
-          <a:lstStyle/>
-          <a:p>
-            <a:pPr>
-              <a:defRPr sz="900">
-                <a:solidFill>
-                  <a:srgbClr val="8291A0"/>
-                </a:solidFill>
-              </a:defRPr>
-            </a:pPr>
-            <a:r>
-              <a:t>SMART CLINIC VACCINE GUARDIAN  |  06</a:t>
-            </a:r>
-          </a:p>
-        </p:txBody>
-      </p:sp>
-    </p:spTree>
-  </p:cSld>
-  <p:clrMapOvr>
-    <a:masterClrMapping/>
-  </p:clrMapOvr>
-</p:sld>
-</file>
-
-<file path=ppt/slides/slide7.xml><?xml version="1.0" encoding="utf-8"?>
-<p:sld xmlns:a="http://schemas.openxmlformats.org/drawingml/2006/main" xmlns:r="http://schemas.openxmlformats.org/officeDocument/2006/relationships" xmlns:p="http://schemas.openxmlformats.org/presentationml/2006/main">
-  <p:cSld>
-    <p:bg>
-      <p:bgPr>
-        <a:solidFill>
-          <a:srgbClr val="0C121C"/>
-        </a:solidFill>
-        <a:effectLst/>
-      </p:bgPr>
-    </p:bg>
-    <p:spTree>
-      <p:nvGrpSpPr>
-        <p:cNvPr id="1" name=""/>
-        <p:cNvGrpSpPr/>
-        <p:nvPr/>
-      </p:nvGrpSpPr>
-      <p:grpSpPr>
-        <a:xfrm>
-          <a:off x="0" y="0"/>
-          <a:ext cx="0" cy="0"/>
-          <a:chOff x="0" y="0"/>
-          <a:chExt cx="0" cy="0"/>
-        </a:xfrm>
-      </p:grpSpPr>
-      <p:sp>
-        <p:nvSpPr>
-          <p:cNvPr id="2" name="Rectangle 1"/>
-          <p:cNvSpPr/>
-          <p:nvPr/>
-        </p:nvSpPr>
-        <p:spPr>
-          <a:xfrm>
-            <a:off x="0" y="0"/>
-            <a:ext cx="164592" cy="6858000"/>
-          </a:xfrm>
-          <a:prstGeom prst="rect">
-            <a:avLst/>
-          </a:prstGeom>
-          <a:solidFill>
-            <a:srgbClr val="4BBE78"/>
-          </a:solidFill>
-          <a:ln>
-            <a:noFill/>
-          </a:ln>
-        </p:spPr>
-        <p:style>
-          <a:lnRef idx="1">
-            <a:schemeClr val="accent1"/>
-          </a:lnRef>
-          <a:fillRef idx="3">
-            <a:schemeClr val="accent1"/>
-          </a:fillRef>
-          <a:effectRef idx="2">
-            <a:schemeClr val="accent1"/>
-          </a:effectRef>
-          <a:fontRef idx="minor">
-            <a:schemeClr val="lt1"/>
-          </a:fontRef>
-        </p:style>
-        <p:txBody>
-          <a:bodyPr rtlCol="0" anchor="ctr"/>
-          <a:lstStyle/>
-          <a:p>
-            <a:pPr algn="ctr"/>
-            <a:endParaRPr/>
-          </a:p>
-        </p:txBody>
-      </p:sp>
-      <p:sp>
-        <p:nvSpPr>
-          <p:cNvPr id="3" name="TextBox 2"/>
-          <p:cNvSpPr txBox="1"/>
-          <p:nvPr/>
-        </p:nvSpPr>
-        <p:spPr>
-          <a:xfrm>
-            <a:off x="685800" y="502920"/>
-            <a:ext cx="10789920" cy="731520"/>
-          </a:xfrm>
-          <a:prstGeom prst="rect">
-            <a:avLst/>
-          </a:prstGeom>
-          <a:noFill/>
-        </p:spPr>
-        <p:txBody>
-          <a:bodyPr wrap="none">
-            <a:spAutoFit/>
-          </a:bodyPr>
-          <a:lstStyle/>
-          <a:p>
-            <a:pPr>
-              <a:defRPr sz="3000" b="1">
-                <a:solidFill>
-                  <a:srgbClr val="F5F8FA"/>
-                </a:solidFill>
-              </a:defRPr>
-            </a:pPr>
-            <a:r>
-              <a:t>12-MONTH PROJECTIONS</a:t>
-            </a:r>
-          </a:p>
-        </p:txBody>
-      </p:sp>
-      <p:sp>
-        <p:nvSpPr>
-          <p:cNvPr id="4" name="TextBox 3"/>
-          <p:cNvSpPr txBox="1"/>
-          <p:nvPr/>
-        </p:nvSpPr>
-        <p:spPr>
-          <a:xfrm>
-            <a:off x="822960" y="1417320"/>
-            <a:ext cx="10607040" cy="3811300"/>
-          </a:xfrm>
-          <a:prstGeom prst="rect">
-            <a:avLst/>
-          </a:prstGeom>
-          <a:noFill/>
-        </p:spPr>
-        <p:txBody>
-          <a:bodyPr wrap="square">
-            <a:spAutoFit/>
-          </a:bodyPr>
-          <a:lstStyle/>
-          <a:p>
-            <a:pPr>
-              <a:spcAft>
-                <a:spcPts val="1400"/>
-              </a:spcAft>
-              <a:defRPr sz="2000">
-                <a:solidFill>
-                  <a:srgbClr val="DCE4EB"/>
-                </a:solidFill>
-              </a:defRPr>
-            </a:pPr>
-            <a:r>
-              <a:rPr dirty="0"/>
-              <a:t>Prototype: </a:t>
-            </a:r>
-            <a:r>
-              <a:rPr lang="en-ZA" dirty="0"/>
-              <a:t>20</a:t>
-            </a:r>
-            <a:r>
-              <a:rPr dirty="0"/>
-              <a:t> units</a:t>
-            </a:r>
-          </a:p>
-          <a:p>
-            <a:pPr>
-              <a:spcAft>
-                <a:spcPts val="1400"/>
-              </a:spcAft>
-              <a:defRPr sz="2000">
-                <a:solidFill>
-                  <a:srgbClr val="DCE4EB"/>
-                </a:solidFill>
-              </a:defRPr>
-            </a:pPr>
-            <a:r>
-              <a:rPr dirty="0"/>
-              <a:t>Pilot: </a:t>
-            </a:r>
-            <a:r>
-              <a:rPr lang="en-ZA" dirty="0"/>
-              <a:t>10</a:t>
-            </a:r>
-            <a:r>
-              <a:rPr dirty="0"/>
-              <a:t>–</a:t>
-            </a:r>
-            <a:r>
-              <a:rPr lang="en-ZA" dirty="0"/>
-              <a:t>20</a:t>
-            </a:r>
-            <a:r>
-              <a:rPr dirty="0"/>
-              <a:t> clinics</a:t>
-            </a:r>
-          </a:p>
-          <a:p>
-            <a:pPr>
-              <a:spcAft>
-                <a:spcPts val="1400"/>
-              </a:spcAft>
-              <a:defRPr sz="2000">
-                <a:solidFill>
-                  <a:srgbClr val="DCE4EB"/>
-                </a:solidFill>
-              </a:defRPr>
-            </a:pPr>
-            <a:r>
-              <a:rPr dirty="0"/>
-              <a:t>Year-1 deployment target: 50 units</a:t>
-            </a:r>
-          </a:p>
-          <a:p>
-            <a:pPr>
-              <a:spcAft>
-                <a:spcPts val="1400"/>
-              </a:spcAft>
-              <a:defRPr sz="2000">
-                <a:solidFill>
-                  <a:srgbClr val="DCE4EB"/>
-                </a:solidFill>
-              </a:defRPr>
-            </a:pPr>
-            <a:r>
-              <a:rPr dirty="0"/>
-              <a:t>Illustrative hardware price: R3,500/unit</a:t>
-            </a:r>
-          </a:p>
-          <a:p>
-            <a:pPr>
-              <a:spcAft>
-                <a:spcPts val="1400"/>
-              </a:spcAft>
-              <a:defRPr sz="2000">
-                <a:solidFill>
-                  <a:srgbClr val="DCE4EB"/>
-                </a:solidFill>
-              </a:defRPr>
-            </a:pPr>
-            <a:r>
-              <a:rPr dirty="0"/>
-              <a:t>Potential hardware revenue at 50 units: R175,000</a:t>
-            </a:r>
-          </a:p>
-          <a:p>
-            <a:pPr>
-              <a:spcAft>
-                <a:spcPts val="1400"/>
-              </a:spcAft>
-              <a:defRPr sz="2000">
-                <a:solidFill>
-                  <a:srgbClr val="DCE4EB"/>
-                </a:solidFill>
-              </a:defRPr>
-            </a:pPr>
-            <a:r>
-              <a:rPr dirty="0"/>
-              <a:t>Monitoring subscription: R150/unit/month</a:t>
-            </a:r>
-          </a:p>
-          <a:p>
-            <a:pPr>
-              <a:spcAft>
-                <a:spcPts val="1400"/>
-              </a:spcAft>
-              <a:defRPr sz="2000">
-                <a:solidFill>
-                  <a:srgbClr val="DCE4EB"/>
-                </a:solidFill>
-              </a:defRPr>
-            </a:pPr>
-            <a:r>
-              <a:rPr dirty="0"/>
-              <a:t>Illustrative Year-1 subscription revenue: ±R90,000*</a:t>
-            </a:r>
-          </a:p>
-          <a:p>
-            <a:pPr>
-              <a:spcAft>
-                <a:spcPts val="1400"/>
-              </a:spcAft>
-              <a:defRPr sz="2000">
-                <a:solidFill>
-                  <a:srgbClr val="DCE4EB"/>
-                </a:solidFill>
-              </a:defRPr>
-            </a:pPr>
-            <a:r>
-              <a:rPr dirty="0"/>
-              <a:t>*Based on progressive deployment during the year.</a:t>
-            </a:r>
-          </a:p>
-        </p:txBody>
-      </p:sp>
-      <p:sp>
-        <p:nvSpPr>
-          <p:cNvPr id="5" name="TextBox 4"/>
-          <p:cNvSpPr txBox="1"/>
-          <p:nvPr/>
-        </p:nvSpPr>
-        <p:spPr>
-          <a:xfrm>
-            <a:off x="685800" y="6446520"/>
-            <a:ext cx="10789920" cy="228600"/>
-          </a:xfrm>
-          <a:prstGeom prst="rect">
-            <a:avLst/>
-          </a:prstGeom>
-          <a:noFill/>
-        </p:spPr>
-        <p:txBody>
-          <a:bodyPr wrap="none">
-            <a:spAutoFit/>
-          </a:bodyPr>
-          <a:lstStyle/>
-          <a:p>
-            <a:pPr>
-              <a:defRPr sz="900">
-                <a:solidFill>
-                  <a:srgbClr val="8291A0"/>
-                </a:solidFill>
-              </a:defRPr>
-            </a:pPr>
-            <a:r>
-              <a:t>SMART CLINIC VACCINE GUARDIAN  |  07</a:t>
-            </a:r>
-          </a:p>
-        </p:txBody>
-      </p:sp>
-    </p:spTree>
-  </p:cSld>
-  <p:clrMapOvr>
-    <a:masterClrMapping/>
-  </p:clrMapOvr>
-</p:sld>
-</file>
-
-<file path=ppt/slides/slide8.xml><?xml version="1.0" encoding="utf-8"?>
-<p:sld xmlns:a="http://schemas.openxmlformats.org/drawingml/2006/main" xmlns:r="http://schemas.openxmlformats.org/officeDocument/2006/relationships" xmlns:p="http://schemas.openxmlformats.org/presentationml/2006/main">
-  <p:cSld>
-    <p:bg>
-      <p:bgPr>
-        <a:solidFill>
-          <a:srgbClr val="0C121C"/>
-        </a:solidFill>
-        <a:effectLst/>
-      </p:bgPr>
-    </p:bg>
-    <p:spTree>
-      <p:nvGrpSpPr>
-        <p:cNvPr id="1" name=""/>
-        <p:cNvGrpSpPr/>
-        <p:nvPr/>
-      </p:nvGrpSpPr>
-      <p:grpSpPr>
-        <a:xfrm>
-          <a:off x="0" y="0"/>
-          <a:ext cx="0" cy="0"/>
-          <a:chOff x="0" y="0"/>
-          <a:chExt cx="0" cy="0"/>
-        </a:xfrm>
-      </p:grpSpPr>
-      <p:sp>
-        <p:nvSpPr>
-          <p:cNvPr id="2" name="Rectangle 1"/>
-          <p:cNvSpPr/>
-          <p:nvPr/>
-        </p:nvSpPr>
-        <p:spPr>
-          <a:xfrm>
-            <a:off x="0" y="0"/>
-            <a:ext cx="164592" cy="6858000"/>
-          </a:xfrm>
-          <a:prstGeom prst="rect">
-            <a:avLst/>
-          </a:prstGeom>
-          <a:solidFill>
-            <a:srgbClr val="4BBE78"/>
-          </a:solidFill>
-          <a:ln>
-            <a:noFill/>
-          </a:ln>
-        </p:spPr>
-        <p:style>
-          <a:lnRef idx="1">
-            <a:schemeClr val="accent1"/>
-          </a:lnRef>
-          <a:fillRef idx="3">
-            <a:schemeClr val="accent1"/>
-          </a:fillRef>
-          <a:effectRef idx="2">
-            <a:schemeClr val="accent1"/>
-          </a:effectRef>
-          <a:fontRef idx="minor">
-            <a:schemeClr val="lt1"/>
-          </a:fontRef>
-        </p:style>
-        <p:txBody>
-          <a:bodyPr rtlCol="0" anchor="ctr"/>
-          <a:lstStyle/>
-          <a:p>
-            <a:pPr algn="ctr"/>
-            <a:endParaRPr/>
-          </a:p>
-        </p:txBody>
-      </p:sp>
-      <p:sp>
-        <p:nvSpPr>
-          <p:cNvPr id="3" name="TextBox 2"/>
-          <p:cNvSpPr txBox="1"/>
-          <p:nvPr/>
-        </p:nvSpPr>
-        <p:spPr>
-          <a:xfrm>
-            <a:off x="685800" y="502920"/>
-            <a:ext cx="10789920" cy="731520"/>
-          </a:xfrm>
-          <a:prstGeom prst="rect">
-            <a:avLst/>
-          </a:prstGeom>
-          <a:noFill/>
-        </p:spPr>
-        <p:txBody>
-          <a:bodyPr wrap="none">
-            <a:spAutoFit/>
-          </a:bodyPr>
-          <a:lstStyle/>
-          <a:p>
-            <a:pPr>
-              <a:defRPr sz="3000" b="1">
-                <a:solidFill>
-                  <a:srgbClr val="F5F8FA"/>
-                </a:solidFill>
-              </a:defRPr>
-            </a:pPr>
-            <a:r>
-              <a:rPr dirty="0"/>
-              <a:t>IMPACT</a:t>
-            </a:r>
-          </a:p>
-        </p:txBody>
-      </p:sp>
-      <p:sp>
-        <p:nvSpPr>
-          <p:cNvPr id="4" name="TextBox 3"/>
-          <p:cNvSpPr txBox="1"/>
-          <p:nvPr/>
-        </p:nvSpPr>
-        <p:spPr>
-          <a:xfrm>
-            <a:off x="822960" y="1417320"/>
-            <a:ext cx="10607040" cy="4663440"/>
-          </a:xfrm>
-          <a:prstGeom prst="rect">
-            <a:avLst/>
-          </a:prstGeom>
-          <a:noFill/>
-        </p:spPr>
-        <p:txBody>
-          <a:bodyPr wrap="square">
-            <a:spAutoFit/>
-          </a:bodyPr>
-          <a:lstStyle/>
-          <a:p>
-            <a:pPr>
-              <a:spcAft>
-                <a:spcPts val="1400"/>
-              </a:spcAft>
-              <a:defRPr sz="2000">
-                <a:solidFill>
-                  <a:srgbClr val="DCE4EB"/>
-                </a:solidFill>
-              </a:defRPr>
-            </a:pPr>
-            <a:r>
-              <a:t>EARLY WARNING — Know when cold storage is drifting toward danger.</a:t>
-            </a:r>
-          </a:p>
-          <a:p>
-            <a:pPr>
-              <a:spcAft>
-                <a:spcPts val="1400"/>
-              </a:spcAft>
-              <a:defRPr sz="2000">
-                <a:solidFill>
-                  <a:srgbClr val="DCE4EB"/>
-                </a:solidFill>
-              </a:defRPr>
-            </a:pPr>
-            <a:r>
-              <a:t>AUTOMATIC RESPONSE — Reduce dependence on manual intervention.</a:t>
-            </a:r>
-          </a:p>
-          <a:p>
-            <a:pPr>
-              <a:spcAft>
-                <a:spcPts val="1400"/>
-              </a:spcAft>
-              <a:defRPr sz="2000">
-                <a:solidFill>
-                  <a:srgbClr val="DCE4EB"/>
-                </a:solidFill>
-              </a:defRPr>
-            </a:pPr>
-            <a:r>
-              <a:t>LESS WASTE — Help prevent avoidable loss of medical stock.</a:t>
-            </a:r>
-          </a:p>
-          <a:p>
-            <a:pPr>
-              <a:spcAft>
-                <a:spcPts val="1400"/>
-              </a:spcAft>
-              <a:defRPr sz="2000">
-                <a:solidFill>
-                  <a:srgbClr val="DCE4EB"/>
-                </a:solidFill>
-              </a:defRPr>
-            </a:pPr>
-            <a:r>
-              <a:t>RURAL-FIRST — Designed around unreliable electricity and limited resources.</a:t>
-            </a:r>
-          </a:p>
-          <a:p>
-            <a:pPr>
-              <a:spcAft>
-                <a:spcPts val="1400"/>
-              </a:spcAft>
-              <a:defRPr sz="2000">
-                <a:solidFill>
-                  <a:srgbClr val="DCE4EB"/>
-                </a:solidFill>
-              </a:defRPr>
-            </a:pPr>
-            <a:r>
-              <a:t>SCALABLE — The architecture can serve clinics across South Africa.</a:t>
-            </a:r>
-          </a:p>
-        </p:txBody>
-      </p:sp>
-      <p:sp>
-        <p:nvSpPr>
-          <p:cNvPr id="5" name="TextBox 4"/>
-          <p:cNvSpPr txBox="1"/>
-          <p:nvPr/>
-        </p:nvSpPr>
-        <p:spPr>
-          <a:xfrm>
-            <a:off x="685800" y="6446520"/>
-            <a:ext cx="10789920" cy="228600"/>
-          </a:xfrm>
-          <a:prstGeom prst="rect">
-            <a:avLst/>
-          </a:prstGeom>
-          <a:noFill/>
-        </p:spPr>
-        <p:txBody>
-          <a:bodyPr wrap="none">
-            <a:spAutoFit/>
-          </a:bodyPr>
-          <a:lstStyle/>
-          <a:p>
-            <a:pPr>
-              <a:defRPr sz="900">
-                <a:solidFill>
-                  <a:srgbClr val="8291A0"/>
-                </a:solidFill>
-              </a:defRPr>
-            </a:pPr>
-            <a:r>
-              <a:t>SMART CLINIC VACCINE GUARDIAN  |  08</a:t>
-            </a:r>
-          </a:p>
-        </p:txBody>
-      </p:sp>
-    </p:spTree>
-  </p:cSld>
-  <p:clrMapOvr>
-    <a:masterClrMapping/>
-  </p:clrMapOvr>
-</p:sld>
-</file>
-
-<file path=ppt/slides/slide9.xml><?xml version="1.0" encoding="utf-8"?>
 <p:sld xmlns:a="http://schemas.openxmlformats.org/drawingml/2006/main" xmlns:r="http://schemas.openxmlformats.org/officeDocument/2006/relationships" xmlns:p="http://schemas.openxmlformats.org/presentationml/2006/main">
   <p:cSld>
     <p:bg>
